--- a/ゲーム科2年/00_前期/ゲーム開発Ⅰ/ゲーム物理学/座学/05_加速度.pptx
+++ b/ゲーム科2年/00_前期/ゲーム開発Ⅰ/ゲーム物理学/座学/05_加速度.pptx
@@ -263,7 +263,7 @@
           <a:p>
             <a:fld id="{E9CC885B-4903-4D54-9A93-00025F12DED9}" type="datetimeFigureOut">
               <a:rPr kumimoji="1" lang="ja-JP" altLang="en-US" smtClean="0"/>
-              <a:t>2024/11/21</a:t>
+              <a:t>2025/4/9</a:t>
             </a:fld>
             <a:endParaRPr kumimoji="1" lang="ja-JP" altLang="en-US"/>
           </a:p>
@@ -493,7 +493,7 @@
           <a:p>
             <a:fld id="{E9CC885B-4903-4D54-9A93-00025F12DED9}" type="datetimeFigureOut">
               <a:rPr kumimoji="1" lang="ja-JP" altLang="en-US" smtClean="0"/>
-              <a:t>2024/11/21</a:t>
+              <a:t>2025/4/9</a:t>
             </a:fld>
             <a:endParaRPr kumimoji="1" lang="ja-JP" altLang="en-US"/>
           </a:p>
@@ -733,7 +733,7 @@
           <a:p>
             <a:fld id="{E9CC885B-4903-4D54-9A93-00025F12DED9}" type="datetimeFigureOut">
               <a:rPr kumimoji="1" lang="ja-JP" altLang="en-US" smtClean="0"/>
-              <a:t>2024/11/21</a:t>
+              <a:t>2025/4/9</a:t>
             </a:fld>
             <a:endParaRPr kumimoji="1" lang="ja-JP" altLang="en-US"/>
           </a:p>
@@ -963,7 +963,7 @@
           <a:p>
             <a:fld id="{E9CC885B-4903-4D54-9A93-00025F12DED9}" type="datetimeFigureOut">
               <a:rPr kumimoji="1" lang="ja-JP" altLang="en-US" smtClean="0"/>
-              <a:t>2024/11/21</a:t>
+              <a:t>2025/4/9</a:t>
             </a:fld>
             <a:endParaRPr kumimoji="1" lang="ja-JP" altLang="en-US"/>
           </a:p>
@@ -1238,7 +1238,7 @@
           <a:p>
             <a:fld id="{E9CC885B-4903-4D54-9A93-00025F12DED9}" type="datetimeFigureOut">
               <a:rPr kumimoji="1" lang="ja-JP" altLang="en-US" smtClean="0"/>
-              <a:t>2024/11/21</a:t>
+              <a:t>2025/4/9</a:t>
             </a:fld>
             <a:endParaRPr kumimoji="1" lang="ja-JP" altLang="en-US"/>
           </a:p>
@@ -1567,7 +1567,7 @@
           <a:p>
             <a:fld id="{E9CC885B-4903-4D54-9A93-00025F12DED9}" type="datetimeFigureOut">
               <a:rPr kumimoji="1" lang="ja-JP" altLang="en-US" smtClean="0"/>
-              <a:t>2024/11/21</a:t>
+              <a:t>2025/4/9</a:t>
             </a:fld>
             <a:endParaRPr kumimoji="1" lang="ja-JP" altLang="en-US"/>
           </a:p>
@@ -2043,7 +2043,7 @@
           <a:p>
             <a:fld id="{E9CC885B-4903-4D54-9A93-00025F12DED9}" type="datetimeFigureOut">
               <a:rPr kumimoji="1" lang="ja-JP" altLang="en-US" smtClean="0"/>
-              <a:t>2024/11/21</a:t>
+              <a:t>2025/4/9</a:t>
             </a:fld>
             <a:endParaRPr kumimoji="1" lang="ja-JP" altLang="en-US"/>
           </a:p>
@@ -2184,7 +2184,7 @@
           <a:p>
             <a:fld id="{E9CC885B-4903-4D54-9A93-00025F12DED9}" type="datetimeFigureOut">
               <a:rPr kumimoji="1" lang="ja-JP" altLang="en-US" smtClean="0"/>
-              <a:t>2024/11/21</a:t>
+              <a:t>2025/4/9</a:t>
             </a:fld>
             <a:endParaRPr kumimoji="1" lang="ja-JP" altLang="en-US"/>
           </a:p>
@@ -2297,7 +2297,7 @@
           <a:p>
             <a:fld id="{E9CC885B-4903-4D54-9A93-00025F12DED9}" type="datetimeFigureOut">
               <a:rPr kumimoji="1" lang="ja-JP" altLang="en-US" smtClean="0"/>
-              <a:t>2024/11/21</a:t>
+              <a:t>2025/4/9</a:t>
             </a:fld>
             <a:endParaRPr kumimoji="1" lang="ja-JP" altLang="en-US"/>
           </a:p>
@@ -2640,7 +2640,7 @@
           <a:p>
             <a:fld id="{E9CC885B-4903-4D54-9A93-00025F12DED9}" type="datetimeFigureOut">
               <a:rPr kumimoji="1" lang="ja-JP" altLang="en-US" smtClean="0"/>
-              <a:t>2024/11/21</a:t>
+              <a:t>2025/4/9</a:t>
             </a:fld>
             <a:endParaRPr kumimoji="1" lang="ja-JP" altLang="en-US"/>
           </a:p>
@@ -2928,7 +2928,7 @@
           <a:p>
             <a:fld id="{E9CC885B-4903-4D54-9A93-00025F12DED9}" type="datetimeFigureOut">
               <a:rPr kumimoji="1" lang="ja-JP" altLang="en-US" smtClean="0"/>
-              <a:t>2024/11/21</a:t>
+              <a:t>2025/4/9</a:t>
             </a:fld>
             <a:endParaRPr kumimoji="1" lang="ja-JP" altLang="en-US"/>
           </a:p>
@@ -3201,7 +3201,7 @@
           <a:p>
             <a:fld id="{E9CC885B-4903-4D54-9A93-00025F12DED9}" type="datetimeFigureOut">
               <a:rPr kumimoji="1" lang="ja-JP" altLang="en-US" smtClean="0"/>
-              <a:t>2024/11/21</a:t>
+              <a:t>2025/4/9</a:t>
             </a:fld>
             <a:endParaRPr kumimoji="1" lang="ja-JP" altLang="en-US"/>
           </a:p>
@@ -4016,8 +4016,8 @@
           </a:graphicData>
         </a:graphic>
       </p:graphicFrame>
-      <mc:AlternateContent xmlns:mc="http://schemas.openxmlformats.org/markup-compatibility/2006" xmlns:a14="http://schemas.microsoft.com/office/drawing/2010/main">
-        <mc:Choice Requires="a14">
+      <mc:AlternateContent xmlns:mc="http://schemas.openxmlformats.org/markup-compatibility/2006">
+        <mc:Choice xmlns:a14="http://schemas.microsoft.com/office/drawing/2010/main" Requires="a14">
           <p:sp>
             <p:nvSpPr>
               <p:cNvPr id="5" name="テキスト ボックス 4">
@@ -4033,7 +4033,7 @@
             <p:spPr>
               <a:xfrm>
                 <a:off x="4885543" y="3429000"/>
-                <a:ext cx="7043916" cy="2710486"/>
+                <a:ext cx="7043916" cy="2341154"/>
               </a:xfrm>
               <a:prstGeom prst="rect">
                 <a:avLst/>
@@ -4200,25 +4200,10 @@
                 </a:r>
                 <a:endParaRPr lang="en-US" altLang="ja-JP" sz="2400" dirty="0"/>
               </a:p>
-              <a:p>
-                <a:r>
-                  <a:rPr lang="ja-JP" altLang="en-US" sz="2400" dirty="0"/>
-                  <a:t>（</a:t>
-                </a:r>
-                <a:r>
-                  <a:rPr lang="en-US" altLang="ja-JP" sz="2400" dirty="0"/>
-                  <a:t>0</a:t>
-                </a:r>
-                <a:r>
-                  <a:rPr lang="ja-JP" altLang="en-US" sz="2400"/>
-                  <a:t>は投げた瞬間なので含めません）</a:t>
-                </a:r>
-                <a:endParaRPr lang="en-US" altLang="ja-JP" sz="2400" dirty="0"/>
-              </a:p>
             </p:txBody>
           </p:sp>
         </mc:Choice>
-        <mc:Fallback xmlns="">
+        <mc:Fallback>
           <p:sp>
             <p:nvSpPr>
               <p:cNvPr id="5" name="テキスト ボックス 4">
@@ -4236,7 +4221,7 @@
             <p:spPr>
               <a:xfrm>
                 <a:off x="4885543" y="3429000"/>
-                <a:ext cx="7043916" cy="2710486"/>
+                <a:ext cx="7043916" cy="2341154"/>
               </a:xfrm>
               <a:prstGeom prst="rect">
                 <a:avLst/>
@@ -4244,7 +4229,7 @@
               <a:blipFill>
                 <a:blip r:embed="rId2"/>
                 <a:stretch>
-                  <a:fillRect l="-1298" t="-1802" r="-346" b="-4054"/>
+                  <a:fillRect l="-1298" t="-2083" r="-346" b="-4948"/>
                 </a:stretch>
               </a:blipFill>
             </p:spPr>
@@ -4381,8 +4366,8 @@
           </a:p>
         </p:txBody>
       </p:sp>
-      <mc:AlternateContent xmlns:mc="http://schemas.openxmlformats.org/markup-compatibility/2006">
-        <mc:Choice xmlns:a14="http://schemas.microsoft.com/office/drawing/2010/main" Requires="a14">
+      <mc:AlternateContent xmlns:mc="http://schemas.openxmlformats.org/markup-compatibility/2006" xmlns:a14="http://schemas.microsoft.com/office/drawing/2010/main">
+        <mc:Choice Requires="a14">
           <p:sp>
             <p:nvSpPr>
               <p:cNvPr id="6" name="テキスト ボックス 5">
@@ -4670,7 +4655,7 @@
             </p:txBody>
           </p:sp>
         </mc:Choice>
-        <mc:Fallback>
+        <mc:Fallback xmlns="">
           <p:sp>
             <p:nvSpPr>
               <p:cNvPr id="6" name="テキスト ボックス 5">
@@ -4785,8 +4770,8 @@
           </a:p>
         </p:txBody>
       </p:sp>
-      <mc:AlternateContent xmlns:mc="http://schemas.openxmlformats.org/markup-compatibility/2006">
-        <mc:Choice xmlns:a14="http://schemas.microsoft.com/office/drawing/2010/main" Requires="a14">
+      <mc:AlternateContent xmlns:mc="http://schemas.openxmlformats.org/markup-compatibility/2006" xmlns:a14="http://schemas.microsoft.com/office/drawing/2010/main">
+        <mc:Choice Requires="a14">
           <p:sp>
             <p:nvSpPr>
               <p:cNvPr id="6" name="テキスト ボックス 5">
@@ -4851,13 +4836,7 @@
                       <a:rPr lang="ja-JP" altLang="en-US" sz="2400" i="1" dirty="0" smtClean="0">
                         <a:latin typeface="Cambria Math" panose="02040503050406030204" pitchFamily="18" charset="0"/>
                       </a:rPr>
-                      <m:t>時間後に</m:t>
-                    </m:r>
-                    <m:r>
-                      <a:rPr lang="ja-JP" altLang="en-US" sz="2400" i="1" dirty="0" smtClean="0">
-                        <a:latin typeface="Cambria Math" panose="02040503050406030204" pitchFamily="18" charset="0"/>
-                      </a:rPr>
-                      <m:t>時速</m:t>
+                      <m:t>時間後に時速</m:t>
                     </m:r>
                     <m:r>
                       <a:rPr lang="en-US" altLang="ja-JP" sz="2400" i="1" dirty="0" smtClean="0">
@@ -5356,13 +5335,7 @@
                           <a:rPr lang="ja-JP" altLang="en-US" sz="2400" i="1" dirty="0">
                             <a:latin typeface="Cambria Math" panose="02040503050406030204" pitchFamily="18" charset="0"/>
                           </a:rPr>
-                          <m:t>時</m:t>
-                        </m:r>
-                        <m:r>
-                          <a:rPr lang="ja-JP" altLang="en-US" sz="2400" i="1" dirty="0">
-                            <a:latin typeface="Cambria Math" panose="02040503050406030204" pitchFamily="18" charset="0"/>
-                          </a:rPr>
-                          <m:t>間</m:t>
+                          <m:t>時間</m:t>
                         </m:r>
                       </m:den>
                     </m:f>
@@ -5448,7 +5421,7 @@
             </p:txBody>
           </p:sp>
         </mc:Choice>
-        <mc:Fallback>
+        <mc:Fallback xmlns="">
           <p:sp>
             <p:nvSpPr>
               <p:cNvPr id="6" name="テキスト ボックス 5">
@@ -5563,8 +5536,8 @@
           </a:p>
         </p:txBody>
       </p:sp>
-      <mc:AlternateContent xmlns:mc="http://schemas.openxmlformats.org/markup-compatibility/2006">
-        <mc:Choice xmlns:a14="http://schemas.microsoft.com/office/drawing/2010/main" Requires="a14">
+      <mc:AlternateContent xmlns:mc="http://schemas.openxmlformats.org/markup-compatibility/2006" xmlns:a14="http://schemas.microsoft.com/office/drawing/2010/main">
+        <mc:Choice Requires="a14">
           <p:sp>
             <p:nvSpPr>
               <p:cNvPr id="6" name="テキスト ボックス 5">
@@ -5844,13 +5817,7 @@
                           <a:rPr lang="en-US" altLang="ja-JP" sz="2400" b="0" i="1" dirty="0" smtClean="0">
                             <a:latin typeface="Cambria Math" panose="02040503050406030204" pitchFamily="18" charset="0"/>
                           </a:rPr>
-                          <m:t>0</m:t>
-                        </m:r>
-                        <m:r>
-                          <a:rPr lang="en-US" altLang="ja-JP" sz="2400" b="0" i="1" dirty="0" smtClean="0">
-                            <a:latin typeface="Cambria Math" panose="02040503050406030204" pitchFamily="18" charset="0"/>
-                          </a:rPr>
-                          <m:t>−72</m:t>
+                          <m:t>0−72</m:t>
                         </m:r>
                         <m:r>
                           <a:rPr lang="en-US" altLang="ja-JP" sz="2400" i="1" dirty="0">
@@ -6452,7 +6419,7 @@
             </p:txBody>
           </p:sp>
         </mc:Choice>
-        <mc:Fallback>
+        <mc:Fallback xmlns="">
           <p:sp>
             <p:nvSpPr>
               <p:cNvPr id="6" name="テキスト ボックス 5">
@@ -6567,8 +6534,8 @@
           </a:p>
         </p:txBody>
       </p:sp>
-      <mc:AlternateContent xmlns:mc="http://schemas.openxmlformats.org/markup-compatibility/2006">
-        <mc:Choice xmlns:a14="http://schemas.microsoft.com/office/drawing/2010/main" Requires="a14">
+      <mc:AlternateContent xmlns:mc="http://schemas.openxmlformats.org/markup-compatibility/2006" xmlns:a14="http://schemas.microsoft.com/office/drawing/2010/main">
+        <mc:Choice Requires="a14">
           <p:sp>
             <p:nvSpPr>
               <p:cNvPr id="6" name="テキスト ボックス 5">
@@ -6708,13 +6675,13 @@
                       <a:rPr lang="ja-JP" altLang="en-US" sz="2400" i="1" dirty="0">
                         <a:latin typeface="Cambria Math" panose="02040503050406030204" pitchFamily="18" charset="0"/>
                       </a:rPr>
-                      <m:t>この自動車の加</m:t>
+                      <m:t>この自動車の加速度</m:t>
                     </m:r>
                     <m:r>
                       <a:rPr lang="ja-JP" altLang="en-US" sz="2400" i="1" dirty="0" smtClean="0">
                         <a:latin typeface="Cambria Math" panose="02040503050406030204" pitchFamily="18" charset="0"/>
                       </a:rPr>
-                      <m:t>速度は何</m:t>
+                      <m:t>は何</m:t>
                     </m:r>
                     <m:r>
                       <a:rPr lang="en-US" altLang="ja-JP" sz="2400" i="1" dirty="0" smtClean="0">
@@ -6915,7 +6882,7 @@
             </p:txBody>
           </p:sp>
         </mc:Choice>
-        <mc:Fallback>
+        <mc:Fallback xmlns="">
           <p:sp>
             <p:nvSpPr>
               <p:cNvPr id="6" name="テキスト ボックス 5">

--- a/ゲーム科2年/00_前期/ゲーム開発Ⅰ/ゲーム物理学/座学/05_加速度.pptx
+++ b/ゲーム科2年/00_前期/ゲーム開発Ⅰ/ゲーム物理学/座学/05_加速度.pptx
@@ -263,7 +263,7 @@
           <a:p>
             <a:fld id="{E9CC885B-4903-4D54-9A93-00025F12DED9}" type="datetimeFigureOut">
               <a:rPr kumimoji="1" lang="ja-JP" altLang="en-US" smtClean="0"/>
-              <a:t>2025/4/9</a:t>
+              <a:t>2025/9/12</a:t>
             </a:fld>
             <a:endParaRPr kumimoji="1" lang="ja-JP" altLang="en-US"/>
           </a:p>
@@ -493,7 +493,7 @@
           <a:p>
             <a:fld id="{E9CC885B-4903-4D54-9A93-00025F12DED9}" type="datetimeFigureOut">
               <a:rPr kumimoji="1" lang="ja-JP" altLang="en-US" smtClean="0"/>
-              <a:t>2025/4/9</a:t>
+              <a:t>2025/9/12</a:t>
             </a:fld>
             <a:endParaRPr kumimoji="1" lang="ja-JP" altLang="en-US"/>
           </a:p>
@@ -733,7 +733,7 @@
           <a:p>
             <a:fld id="{E9CC885B-4903-4D54-9A93-00025F12DED9}" type="datetimeFigureOut">
               <a:rPr kumimoji="1" lang="ja-JP" altLang="en-US" smtClean="0"/>
-              <a:t>2025/4/9</a:t>
+              <a:t>2025/9/12</a:t>
             </a:fld>
             <a:endParaRPr kumimoji="1" lang="ja-JP" altLang="en-US"/>
           </a:p>
@@ -963,7 +963,7 @@
           <a:p>
             <a:fld id="{E9CC885B-4903-4D54-9A93-00025F12DED9}" type="datetimeFigureOut">
               <a:rPr kumimoji="1" lang="ja-JP" altLang="en-US" smtClean="0"/>
-              <a:t>2025/4/9</a:t>
+              <a:t>2025/9/12</a:t>
             </a:fld>
             <a:endParaRPr kumimoji="1" lang="ja-JP" altLang="en-US"/>
           </a:p>
@@ -1238,7 +1238,7 @@
           <a:p>
             <a:fld id="{E9CC885B-4903-4D54-9A93-00025F12DED9}" type="datetimeFigureOut">
               <a:rPr kumimoji="1" lang="ja-JP" altLang="en-US" smtClean="0"/>
-              <a:t>2025/4/9</a:t>
+              <a:t>2025/9/12</a:t>
             </a:fld>
             <a:endParaRPr kumimoji="1" lang="ja-JP" altLang="en-US"/>
           </a:p>
@@ -1567,7 +1567,7 @@
           <a:p>
             <a:fld id="{E9CC885B-4903-4D54-9A93-00025F12DED9}" type="datetimeFigureOut">
               <a:rPr kumimoji="1" lang="ja-JP" altLang="en-US" smtClean="0"/>
-              <a:t>2025/4/9</a:t>
+              <a:t>2025/9/12</a:t>
             </a:fld>
             <a:endParaRPr kumimoji="1" lang="ja-JP" altLang="en-US"/>
           </a:p>
@@ -2043,7 +2043,7 @@
           <a:p>
             <a:fld id="{E9CC885B-4903-4D54-9A93-00025F12DED9}" type="datetimeFigureOut">
               <a:rPr kumimoji="1" lang="ja-JP" altLang="en-US" smtClean="0"/>
-              <a:t>2025/4/9</a:t>
+              <a:t>2025/9/12</a:t>
             </a:fld>
             <a:endParaRPr kumimoji="1" lang="ja-JP" altLang="en-US"/>
           </a:p>
@@ -2184,7 +2184,7 @@
           <a:p>
             <a:fld id="{E9CC885B-4903-4D54-9A93-00025F12DED9}" type="datetimeFigureOut">
               <a:rPr kumimoji="1" lang="ja-JP" altLang="en-US" smtClean="0"/>
-              <a:t>2025/4/9</a:t>
+              <a:t>2025/9/12</a:t>
             </a:fld>
             <a:endParaRPr kumimoji="1" lang="ja-JP" altLang="en-US"/>
           </a:p>
@@ -2297,7 +2297,7 @@
           <a:p>
             <a:fld id="{E9CC885B-4903-4D54-9A93-00025F12DED9}" type="datetimeFigureOut">
               <a:rPr kumimoji="1" lang="ja-JP" altLang="en-US" smtClean="0"/>
-              <a:t>2025/4/9</a:t>
+              <a:t>2025/9/12</a:t>
             </a:fld>
             <a:endParaRPr kumimoji="1" lang="ja-JP" altLang="en-US"/>
           </a:p>
@@ -2640,7 +2640,7 @@
           <a:p>
             <a:fld id="{E9CC885B-4903-4D54-9A93-00025F12DED9}" type="datetimeFigureOut">
               <a:rPr kumimoji="1" lang="ja-JP" altLang="en-US" smtClean="0"/>
-              <a:t>2025/4/9</a:t>
+              <a:t>2025/9/12</a:t>
             </a:fld>
             <a:endParaRPr kumimoji="1" lang="ja-JP" altLang="en-US"/>
           </a:p>
@@ -2928,7 +2928,7 @@
           <a:p>
             <a:fld id="{E9CC885B-4903-4D54-9A93-00025F12DED9}" type="datetimeFigureOut">
               <a:rPr kumimoji="1" lang="ja-JP" altLang="en-US" smtClean="0"/>
-              <a:t>2025/4/9</a:t>
+              <a:t>2025/9/12</a:t>
             </a:fld>
             <a:endParaRPr kumimoji="1" lang="ja-JP" altLang="en-US"/>
           </a:p>
@@ -3201,7 +3201,7 @@
           <a:p>
             <a:fld id="{E9CC885B-4903-4D54-9A93-00025F12DED9}" type="datetimeFigureOut">
               <a:rPr kumimoji="1" lang="ja-JP" altLang="en-US" smtClean="0"/>
-              <a:t>2025/4/9</a:t>
+              <a:t>2025/9/12</a:t>
             </a:fld>
             <a:endParaRPr kumimoji="1" lang="ja-JP" altLang="en-US"/>
           </a:p>
@@ -4016,8 +4016,8 @@
           </a:graphicData>
         </a:graphic>
       </p:graphicFrame>
-      <mc:AlternateContent xmlns:mc="http://schemas.openxmlformats.org/markup-compatibility/2006">
-        <mc:Choice xmlns:a14="http://schemas.microsoft.com/office/drawing/2010/main" Requires="a14">
+      <mc:AlternateContent xmlns:mc="http://schemas.openxmlformats.org/markup-compatibility/2006" xmlns:a14="http://schemas.microsoft.com/office/drawing/2010/main">
+        <mc:Choice Requires="a14">
           <p:sp>
             <p:nvSpPr>
               <p:cNvPr id="5" name="テキスト ボックス 4">
@@ -4203,7 +4203,7 @@
             </p:txBody>
           </p:sp>
         </mc:Choice>
-        <mc:Fallback>
+        <mc:Fallback xmlns="">
           <p:sp>
             <p:nvSpPr>
               <p:cNvPr id="5" name="テキスト ボックス 4">
@@ -4366,8 +4366,8 @@
           </a:p>
         </p:txBody>
       </p:sp>
-      <mc:AlternateContent xmlns:mc="http://schemas.openxmlformats.org/markup-compatibility/2006" xmlns:a14="http://schemas.microsoft.com/office/drawing/2010/main">
-        <mc:Choice Requires="a14">
+      <mc:AlternateContent xmlns:mc="http://schemas.openxmlformats.org/markup-compatibility/2006">
+        <mc:Choice xmlns:a14="http://schemas.microsoft.com/office/drawing/2010/main" Requires="a14">
           <p:sp>
             <p:nvSpPr>
               <p:cNvPr id="6" name="テキスト ボックス 5">
@@ -4412,7 +4412,7 @@
                       <a:srgbClr val="FF0000"/>
                     </a:solidFill>
                   </a:rPr>
-                  <a:t>■変位、速度、時間の公式</a:t>
+                  <a:t>■加速度の公式</a:t>
                 </a:r>
                 <a:endParaRPr lang="en-US" altLang="ja-JP" sz="2400" b="1" dirty="0">
                   <a:solidFill>
@@ -4655,7 +4655,7 @@
             </p:txBody>
           </p:sp>
         </mc:Choice>
-        <mc:Fallback xmlns="">
+        <mc:Fallback>
           <p:sp>
             <p:nvSpPr>
               <p:cNvPr id="6" name="テキスト ボックス 5">
@@ -4770,8 +4770,8 @@
           </a:p>
         </p:txBody>
       </p:sp>
-      <mc:AlternateContent xmlns:mc="http://schemas.openxmlformats.org/markup-compatibility/2006" xmlns:a14="http://schemas.microsoft.com/office/drawing/2010/main">
-        <mc:Choice Requires="a14">
+      <mc:AlternateContent xmlns:mc="http://schemas.openxmlformats.org/markup-compatibility/2006">
+        <mc:Choice xmlns:a14="http://schemas.microsoft.com/office/drawing/2010/main" Requires="a14">
           <p:sp>
             <p:nvSpPr>
               <p:cNvPr id="6" name="テキスト ボックス 5">
@@ -4787,7 +4787,7 @@
             <p:spPr>
               <a:xfrm>
                 <a:off x="567542" y="1216429"/>
-                <a:ext cx="8133958" cy="4379340"/>
+                <a:ext cx="8988102" cy="4379340"/>
               </a:xfrm>
               <a:prstGeom prst="rect">
                 <a:avLst/>
@@ -5345,6 +5345,68 @@
                       </a:rPr>
                       <m:t>=</m:t>
                     </m:r>
+                    <m:f>
+                      <m:fPr>
+                        <m:ctrlPr>
+                          <a:rPr lang="en-US" altLang="ja-JP" sz="2400" i="1" dirty="0" smtClean="0">
+                            <a:latin typeface="Cambria Math" panose="02040503050406030204" pitchFamily="18" charset="0"/>
+                          </a:rPr>
+                        </m:ctrlPr>
+                      </m:fPr>
+                      <m:num>
+                        <m:r>
+                          <a:rPr lang="en-US" altLang="ja-JP" sz="2400" i="1" dirty="0">
+                            <a:latin typeface="Cambria Math" panose="02040503050406030204" pitchFamily="18" charset="0"/>
+                          </a:rPr>
+                          <m:t>20</m:t>
+                        </m:r>
+                        <m:r>
+                          <a:rPr lang="en-US" altLang="ja-JP" sz="2400" b="0" i="1" dirty="0" smtClean="0">
+                            <a:latin typeface="Cambria Math" panose="02040503050406030204" pitchFamily="18" charset="0"/>
+                          </a:rPr>
+                          <m:t>𝑘𝑚</m:t>
+                        </m:r>
+                      </m:num>
+                      <m:den>
+                        <m:r>
+                          <a:rPr lang="en-US" altLang="ja-JP" sz="2400" i="1" dirty="0">
+                            <a:latin typeface="Cambria Math" panose="02040503050406030204" pitchFamily="18" charset="0"/>
+                          </a:rPr>
+                          <m:t>2</m:t>
+                        </m:r>
+                        <m:sSup>
+                          <m:sSupPr>
+                            <m:ctrlPr>
+                              <a:rPr lang="en-US" altLang="ja-JP" sz="2400" i="1" dirty="0">
+                                <a:latin typeface="Cambria Math" panose="02040503050406030204" pitchFamily="18" charset="0"/>
+                              </a:rPr>
+                            </m:ctrlPr>
+                          </m:sSupPr>
+                          <m:e>
+                            <m:r>
+                              <a:rPr lang="ja-JP" altLang="en-US" sz="2400" i="1" dirty="0">
+                                <a:latin typeface="Cambria Math" panose="02040503050406030204" pitchFamily="18" charset="0"/>
+                              </a:rPr>
+                              <m:t>時間</m:t>
+                            </m:r>
+                          </m:e>
+                          <m:sup>
+                            <m:r>
+                              <a:rPr lang="en-US" altLang="ja-JP" sz="2400" b="0" i="1" dirty="0" smtClean="0">
+                                <a:latin typeface="Cambria Math" panose="02040503050406030204" pitchFamily="18" charset="0"/>
+                              </a:rPr>
+                              <m:t>2</m:t>
+                            </m:r>
+                          </m:sup>
+                        </m:sSup>
+                      </m:den>
+                    </m:f>
+                    <m:r>
+                      <a:rPr lang="en-US" altLang="ja-JP" sz="2400" b="0" i="1" dirty="0" smtClean="0">
+                        <a:latin typeface="Cambria Math" panose="02040503050406030204" pitchFamily="18" charset="0"/>
+                      </a:rPr>
+                      <m:t>=</m:t>
+                    </m:r>
                     <m:r>
                       <a:rPr lang="en-US" altLang="ja-JP" sz="2400" b="0" i="1" dirty="0" smtClean="0">
                         <a:solidFill>
@@ -5421,7 +5483,7 @@
             </p:txBody>
           </p:sp>
         </mc:Choice>
-        <mc:Fallback xmlns="">
+        <mc:Fallback>
           <p:sp>
             <p:nvSpPr>
               <p:cNvPr id="6" name="テキスト ボックス 5">
@@ -5439,7 +5501,7 @@
             <p:spPr>
               <a:xfrm>
                 <a:off x="567542" y="1216429"/>
-                <a:ext cx="8133958" cy="4379340"/>
+                <a:ext cx="8988102" cy="4379340"/>
               </a:xfrm>
               <a:prstGeom prst="rect">
                 <a:avLst/>
@@ -5447,7 +5509,7 @@
               <a:blipFill>
                 <a:blip r:embed="rId2"/>
                 <a:stretch>
-                  <a:fillRect l="-1124"/>
+                  <a:fillRect l="-1017"/>
                 </a:stretch>
               </a:blipFill>
             </p:spPr>
@@ -6675,13 +6737,7 @@
                       <a:rPr lang="ja-JP" altLang="en-US" sz="2400" i="1" dirty="0">
                         <a:latin typeface="Cambria Math" panose="02040503050406030204" pitchFamily="18" charset="0"/>
                       </a:rPr>
-                      <m:t>この自動車の加速度</m:t>
-                    </m:r>
-                    <m:r>
-                      <a:rPr lang="ja-JP" altLang="en-US" sz="2400" i="1" dirty="0" smtClean="0">
-                        <a:latin typeface="Cambria Math" panose="02040503050406030204" pitchFamily="18" charset="0"/>
-                      </a:rPr>
-                      <m:t>は何</m:t>
+                      <m:t>この自動車の加速度は何</m:t>
                     </m:r>
                     <m:r>
                       <a:rPr lang="en-US" altLang="ja-JP" sz="2400" i="1" dirty="0" smtClean="0">
